--- a/docs/proposals/softbank-ultraman-caravan/テスト実施のご提案パターン.pptx
+++ b/docs/proposals/softbank-ultraman-caravan/テスト実施のご提案パターン.pptx
@@ -7,6 +7,8 @@
   <p:sldIdLst>
     <p:sldId id="256" r:id="rId7"/>
     <p:sldId id="257" r:id="rId8"/>
+    <p:sldId id="258" r:id="rId9"/>
+    <p:sldId id="259" r:id="rId10"/>
   </p:sldIdLst>
   <p:sldSz cx="12191695" cy="6858000" type="screen4x3"/>
   <p:notesSz cx="6858000" cy="9144000"/>
@@ -4768,6 +4770,1582 @@
 </p:sld>
 </file>
 
+<file path=ppt/slides/slide3.xml><?xml version="1.0" encoding="utf-8"?>
+<p:sld xmlns:a="http://schemas.openxmlformats.org/drawingml/2006/main" xmlns:p="http://schemas.openxmlformats.org/presentationml/2006/main" xmlns:r="http://schemas.openxmlformats.org/officeDocument/2006/relationships">
+  <p:cSld>
+    <p:spTree>
+      <p:nvGrpSpPr>
+        <p:cNvPr id="1" name=""/>
+        <p:cNvGrpSpPr/>
+        <p:nvPr/>
+      </p:nvGrpSpPr>
+      <p:grpSpPr/>
+      <p:pic>
+        <p:nvPicPr>
+          <p:cNvPr id="2" name="Picture 1" descr="band_header.png"/>
+          <p:cNvPicPr>
+            <a:picLocks noChangeAspect="1"/>
+          </p:cNvPicPr>
+          <p:nvPr/>
+        </p:nvPicPr>
+        <p:blipFill>
+          <a:blip r:embed="rId2"/>
+          <a:stretch>
+            <a:fillRect/>
+          </a:stretch>
+        </p:blipFill>
+        <p:spPr>
+          <a:xfrm>
+            <a:off x="0" y="0"/>
+            <a:ext cx="12191695" cy="786384"/>
+          </a:xfrm>
+          <a:prstGeom prst="rect">
+            <a:avLst/>
+          </a:prstGeom>
+        </p:spPr>
+      </p:pic>
+      <p:sp>
+        <p:nvSpPr>
+          <p:cNvPr id="3" name="TextBox 2"/>
+          <p:cNvSpPr txBox="1"/>
+          <p:nvPr/>
+        </p:nvSpPr>
+        <p:spPr>
+          <a:xfrm>
+            <a:off x="457200" y="73152"/>
+            <a:ext cx="10241280" cy="640080"/>
+          </a:xfrm>
+          <a:prstGeom prst="rect">
+            <a:avLst/>
+          </a:prstGeom>
+          <a:noFill/>
+        </p:spPr>
+        <p:txBody>
+          <a:bodyPr wrap="square" anchor="ctr" lIns="0" rIns="0" tIns="0" bIns="0">
+            <a:spAutoFit/>
+          </a:bodyPr>
+          <a:lstStyle/>
+          <a:p>
+            <a:pPr algn="l">
+              <a:spcAft>
+                <a:spcPts val="500"/>
+              </a:spcAft>
+            </a:pPr>
+            <a:r>
+              <a:rPr sz="2100" b="1">
+                <a:solidFill>
+                  <a:srgbClr val="FFFFFF"/>
+                </a:solidFill>
+                <a:latin typeface="Meiryo"/>
+                <a:ea typeface="Meiryo"/>
+              </a:rPr>
+              <a:t>パイロットの成功基準と年間契約への接続(ご提案)</a:t>
+            </a:r>
+          </a:p>
+        </p:txBody>
+      </p:sp>
+      <p:sp>
+        <p:nvSpPr>
+          <p:cNvPr id="4" name="TextBox 3"/>
+          <p:cNvSpPr txBox="1"/>
+          <p:nvPr/>
+        </p:nvSpPr>
+        <p:spPr>
+          <a:xfrm>
+            <a:off x="502920" y="896112"/>
+            <a:ext cx="11155680" cy="365760"/>
+          </a:xfrm>
+          <a:prstGeom prst="rect">
+            <a:avLst/>
+          </a:prstGeom>
+          <a:noFill/>
+        </p:spPr>
+        <p:txBody>
+          <a:bodyPr wrap="square" anchor="t" lIns="0" rIns="0" tIns="0" bIns="0">
+            <a:spAutoFit/>
+          </a:bodyPr>
+          <a:lstStyle/>
+          <a:p>
+            <a:pPr algn="l">
+              <a:spcAft>
+                <a:spcPts val="500"/>
+              </a:spcAft>
+            </a:pPr>
+            <a:r>
+              <a:rPr sz="1250" b="0">
+                <a:solidFill>
+                  <a:srgbClr val="5A626B"/>
+                </a:solidFill>
+                <a:latin typeface="Meiryo"/>
+                <a:ea typeface="Meiryo"/>
+              </a:rPr>
+              <a:t>パイロットを「やって終わり」にしないため、成功基準と移行条件を事前にご合意いただく設計です</a:t>
+            </a:r>
+          </a:p>
+        </p:txBody>
+      </p:sp>
+      <p:sp>
+        <p:nvSpPr>
+          <p:cNvPr id="5" name="TextBox 4"/>
+          <p:cNvSpPr txBox="1"/>
+          <p:nvPr/>
+        </p:nvSpPr>
+        <p:spPr>
+          <a:xfrm>
+            <a:off x="4727448" y="6547104"/>
+            <a:ext cx="2743200" cy="256032"/>
+          </a:xfrm>
+          <a:prstGeom prst="rect">
+            <a:avLst/>
+          </a:prstGeom>
+          <a:noFill/>
+        </p:spPr>
+        <p:txBody>
+          <a:bodyPr wrap="square" anchor="t" lIns="0" rIns="0" tIns="0" bIns="0">
+            <a:spAutoFit/>
+          </a:bodyPr>
+          <a:lstStyle/>
+          <a:p>
+            <a:pPr algn="ctr">
+              <a:spcAft>
+                <a:spcPts val="500"/>
+              </a:spcAft>
+            </a:pPr>
+            <a:r>
+              <a:rPr sz="800" b="0">
+                <a:solidFill>
+                  <a:srgbClr val="8E949B"/>
+                </a:solidFill>
+                <a:latin typeface="Meiryo"/>
+                <a:ea typeface="Meiryo"/>
+              </a:rPr>
+              <a:t>© TSUBURAYA PRODUCTIONS</a:t>
+            </a:r>
+          </a:p>
+        </p:txBody>
+      </p:sp>
+      <p:sp>
+        <p:nvSpPr>
+          <p:cNvPr id="6" name="TextBox 5"/>
+          <p:cNvSpPr txBox="1"/>
+          <p:nvPr/>
+        </p:nvSpPr>
+        <p:spPr>
+          <a:xfrm>
+            <a:off x="9372600" y="6492240"/>
+            <a:ext cx="2011680" cy="274320"/>
+          </a:xfrm>
+          <a:prstGeom prst="rect">
+            <a:avLst/>
+          </a:prstGeom>
+          <a:noFill/>
+        </p:spPr>
+        <p:txBody>
+          <a:bodyPr wrap="square" anchor="t" lIns="0" rIns="0" tIns="0" bIns="0">
+            <a:spAutoFit/>
+          </a:bodyPr>
+          <a:lstStyle/>
+          <a:p>
+            <a:pPr algn="r">
+              <a:spcAft>
+                <a:spcPts val="500"/>
+              </a:spcAft>
+            </a:pPr>
+            <a:r>
+              <a:rPr sz="1000" b="1">
+                <a:solidFill>
+                  <a:srgbClr val="C00000"/>
+                </a:solidFill>
+                <a:latin typeface="Meiryo"/>
+                <a:ea typeface="Meiryo"/>
+              </a:rPr>
+              <a:t>Strictly Confidential</a:t>
+            </a:r>
+          </a:p>
+        </p:txBody>
+      </p:sp>
+      <p:sp>
+        <p:nvSpPr>
+          <p:cNvPr id="7" name="TextBox 6"/>
+          <p:cNvSpPr txBox="1"/>
+          <p:nvPr/>
+        </p:nvSpPr>
+        <p:spPr>
+          <a:xfrm>
+            <a:off x="11521440" y="6492240"/>
+            <a:ext cx="457200" cy="274320"/>
+          </a:xfrm>
+          <a:prstGeom prst="rect">
+            <a:avLst/>
+          </a:prstGeom>
+          <a:noFill/>
+        </p:spPr>
+        <p:txBody>
+          <a:bodyPr wrap="square" anchor="t" lIns="0" rIns="0" tIns="0" bIns="0">
+            <a:spAutoFit/>
+          </a:bodyPr>
+          <a:lstStyle/>
+          <a:p>
+            <a:pPr algn="r">
+              <a:spcAft>
+                <a:spcPts val="500"/>
+              </a:spcAft>
+            </a:pPr>
+            <a:r>
+              <a:rPr sz="1000" b="0">
+                <a:solidFill>
+                  <a:srgbClr val="8E949B"/>
+                </a:solidFill>
+                <a:latin typeface="Meiryo"/>
+                <a:ea typeface="Meiryo"/>
+              </a:rPr>
+              <a:t>3</a:t>
+            </a:r>
+          </a:p>
+        </p:txBody>
+      </p:sp>
+      <p:graphicFrame>
+        <p:nvGraphicFramePr>
+          <p:cNvPr id="8" name="Table 7"/>
+          <p:cNvGraphicFramePr>
+            <a:graphicFrameLocks noGrp="1"/>
+          </p:cNvGraphicFramePr>
+          <p:nvPr/>
+        </p:nvGraphicFramePr>
+        <p:xfrm>
+          <a:off x="640080" y="1417320"/>
+          <a:ext cx="10881359" cy="2514600"/>
+        </p:xfrm>
+        <a:graphic>
+          <a:graphicData uri="http://schemas.openxmlformats.org/drawingml/2006/table">
+            <a:tbl>
+              <a:tblPr firstRow="1" bandRow="1">
+                <a:tableStyleId>{5C22544A-7EE6-4342-B048-85BDC9FD1C3A}</a:tableStyleId>
+              </a:tblPr>
+              <a:tblGrid>
+                <a:gridCol w="3548269"/>
+                <a:gridCol w="3311718"/>
+                <a:gridCol w="4021372"/>
+              </a:tblGrid>
+              <a:tr h="502920">
+                <a:tc>
+                  <a:txBody>
+                    <a:bodyPr/>
+                    <a:lstStyle/>
+                    <a:p>
+                      <a:r>
+                        <a:rPr sz="1150" b="1">
+                          <a:solidFill>
+                            <a:srgbClr val="FFFFFF"/>
+                          </a:solidFill>
+                          <a:latin typeface="Meiryo"/>
+                          <a:ea typeface="Meiryo"/>
+                        </a:rPr>
+                        <a:t>成功基準(貴社と共同設定)</a:t>
+                      </a:r>
+                    </a:p>
+                  </a:txBody>
+                  <a:tcPr anchor="ctr" marL="73152" marR="73152">
+                    <a:solidFill>
+                      <a:srgbClr val="232278"/>
+                    </a:solidFill>
+                  </a:tcPr>
+                </a:tc>
+                <a:tc>
+                  <a:txBody>
+                    <a:bodyPr/>
+                    <a:lstStyle/>
+                    <a:p>
+                      <a:r>
+                        <a:rPr sz="1150" b="1">
+                          <a:solidFill>
+                            <a:srgbClr val="FFFFFF"/>
+                          </a:solidFill>
+                          <a:latin typeface="Meiryo"/>
+                          <a:ea typeface="Meiryo"/>
+                        </a:rPr>
+                        <a:t>測定方法</a:t>
+                      </a:r>
+                    </a:p>
+                  </a:txBody>
+                  <a:tcPr anchor="ctr" marL="73152" marR="73152">
+                    <a:solidFill>
+                      <a:srgbClr val="232278"/>
+                    </a:solidFill>
+                  </a:tcPr>
+                </a:tc>
+                <a:tc>
+                  <a:txBody>
+                    <a:bodyPr/>
+                    <a:lstStyle/>
+                    <a:p>
+                      <a:r>
+                        <a:rPr sz="1150" b="1">
+                          <a:solidFill>
+                            <a:srgbClr val="FFFFFF"/>
+                          </a:solidFill>
+                          <a:latin typeface="Meiryo"/>
+                          <a:ea typeface="Meiryo"/>
+                        </a:rPr>
+                        <a:t>目安</a:t>
+                      </a:r>
+                    </a:p>
+                  </a:txBody>
+                  <a:tcPr anchor="ctr" marL="73152" marR="73152">
+                    <a:solidFill>
+                      <a:srgbClr val="232278"/>
+                    </a:solidFill>
+                  </a:tcPr>
+                </a:tc>
+              </a:tr>
+              <a:tr h="502920">
+                <a:tc>
+                  <a:txBody>
+                    <a:bodyPr/>
+                    <a:lstStyle/>
+                    <a:p>
+                      <a:r>
+                        <a:rPr sz="1150" b="0">
+                          <a:solidFill>
+                            <a:srgbClr val="1A1A1A"/>
+                          </a:solidFill>
+                          <a:latin typeface="Meiryo"/>
+                          <a:ea typeface="Meiryo"/>
+                        </a:rPr>
+                        <a:t>店頭集客(1開催あたり来場)</a:t>
+                      </a:r>
+                    </a:p>
+                  </a:txBody>
+                  <a:tcPr anchor="ctr" marL="73152" marR="73152">
+                    <a:solidFill>
+                      <a:srgbClr val="FFFFFF"/>
+                    </a:solidFill>
+                  </a:tcPr>
+                </a:tc>
+                <a:tc>
+                  <a:txBody>
+                    <a:bodyPr/>
+                    <a:lstStyle/>
+                    <a:p>
+                      <a:r>
+                        <a:rPr sz="1150" b="0">
+                          <a:solidFill>
+                            <a:srgbClr val="1A1A1A"/>
+                          </a:solidFill>
+                          <a:latin typeface="Meiryo"/>
+                          <a:ea typeface="Meiryo"/>
+                        </a:rPr>
+                        <a:t>会場カウント+キットQR読取数</a:t>
+                      </a:r>
+                    </a:p>
+                  </a:txBody>
+                  <a:tcPr anchor="ctr" marL="73152" marR="73152">
+                    <a:solidFill>
+                      <a:srgbClr val="FFFFFF"/>
+                    </a:solidFill>
+                  </a:tcPr>
+                </a:tc>
+                <a:tc>
+                  <a:txBody>
+                    <a:bodyPr/>
+                    <a:lstStyle/>
+                    <a:p>
+                      <a:r>
+                        <a:rPr sz="1150" b="0">
+                          <a:solidFill>
+                            <a:srgbClr val="1A1A1A"/>
+                          </a:solidFill>
+                          <a:latin typeface="Meiryo"/>
+                          <a:ea typeface="Meiryo"/>
+                        </a:rPr>
+                        <a:t>現行IP施策の同等水準(比80%以上)を基準に共同設定</a:t>
+                      </a:r>
+                    </a:p>
+                  </a:txBody>
+                  <a:tcPr anchor="ctr" marL="73152" marR="73152">
+                    <a:solidFill>
+                      <a:srgbClr val="FFFFFF"/>
+                    </a:solidFill>
+                  </a:tcPr>
+                </a:tc>
+              </a:tr>
+              <a:tr h="502920">
+                <a:tc>
+                  <a:txBody>
+                    <a:bodyPr/>
+                    <a:lstStyle/>
+                    <a:p>
+                      <a:r>
+                        <a:rPr sz="1150" b="0">
+                          <a:solidFill>
+                            <a:srgbClr val="1A1A1A"/>
+                          </a:solidFill>
+                          <a:latin typeface="Meiryo"/>
+                          <a:ea typeface="Meiryo"/>
+                        </a:rPr>
+                        <a:t>撮影会参加組数</a:t>
+                      </a:r>
+                    </a:p>
+                  </a:txBody>
+                  <a:tcPr anchor="ctr" marL="73152" marR="73152">
+                    <a:solidFill>
+                      <a:srgbClr val="F2F4F6"/>
+                    </a:solidFill>
+                  </a:tcPr>
+                </a:tc>
+                <a:tc>
+                  <a:txBody>
+                    <a:bodyPr/>
+                    <a:lstStyle/>
+                    <a:p>
+                      <a:r>
+                        <a:rPr sz="1150" b="0">
+                          <a:solidFill>
+                            <a:srgbClr val="1A1A1A"/>
+                          </a:solidFill>
+                          <a:latin typeface="Meiryo"/>
+                          <a:ea typeface="Meiryo"/>
+                        </a:rPr>
+                        <a:t>参加受付数(1回30分×5回/日)</a:t>
+                      </a:r>
+                    </a:p>
+                  </a:txBody>
+                  <a:tcPr anchor="ctr" marL="73152" marR="73152">
+                    <a:solidFill>
+                      <a:srgbClr val="F2F4F6"/>
+                    </a:solidFill>
+                  </a:tcPr>
+                </a:tc>
+                <a:tc>
+                  <a:txBody>
+                    <a:bodyPr/>
+                    <a:lstStyle/>
+                    <a:p>
+                      <a:r>
+                        <a:rPr sz="1150" b="0">
+                          <a:solidFill>
+                            <a:srgbClr val="1A1A1A"/>
+                          </a:solidFill>
+                          <a:latin typeface="Meiryo"/>
+                          <a:ea typeface="Meiryo"/>
+                        </a:rPr>
+                        <a:t>同上</a:t>
+                      </a:r>
+                    </a:p>
+                  </a:txBody>
+                  <a:tcPr anchor="ctr" marL="73152" marR="73152">
+                    <a:solidFill>
+                      <a:srgbClr val="F2F4F6"/>
+                    </a:solidFill>
+                  </a:tcPr>
+                </a:tc>
+              </a:tr>
+              <a:tr h="502920">
+                <a:tc>
+                  <a:txBody>
+                    <a:bodyPr/>
+                    <a:lstStyle/>
+                    <a:p>
+                      <a:r>
+                        <a:rPr sz="1150" b="0">
+                          <a:solidFill>
+                            <a:srgbClr val="1A1A1A"/>
+                          </a:solidFill>
+                          <a:latin typeface="Meiryo"/>
+                          <a:ea typeface="Meiryo"/>
+                        </a:rPr>
+                        <a:t>ブース接触→相談への転換</a:t>
+                      </a:r>
+                    </a:p>
+                  </a:txBody>
+                  <a:tcPr anchor="ctr" marL="73152" marR="73152">
+                    <a:solidFill>
+                      <a:srgbClr val="FFFFFF"/>
+                    </a:solidFill>
+                  </a:tcPr>
+                </a:tc>
+                <a:tc>
+                  <a:txBody>
+                    <a:bodyPr/>
+                    <a:lstStyle/>
+                    <a:p>
+                      <a:r>
+                        <a:rPr sz="1150" b="0">
+                          <a:solidFill>
+                            <a:srgbClr val="1A1A1A"/>
+                          </a:solidFill>
+                          <a:latin typeface="Meiryo"/>
+                          <a:ea typeface="Meiryo"/>
+                        </a:rPr>
+                        <a:t>QRアンケート+店頭相談記録</a:t>
+                      </a:r>
+                    </a:p>
+                  </a:txBody>
+                  <a:tcPr anchor="ctr" marL="73152" marR="73152">
+                    <a:solidFill>
+                      <a:srgbClr val="FFFFFF"/>
+                    </a:solidFill>
+                  </a:tcPr>
+                </a:tc>
+                <a:tc>
+                  <a:txBody>
+                    <a:bodyPr/>
+                    <a:lstStyle/>
+                    <a:p>
+                      <a:r>
+                        <a:rPr sz="1150" b="0">
+                          <a:solidFill>
+                            <a:srgbClr val="1A1A1A"/>
+                          </a:solidFill>
+                          <a:latin typeface="Meiryo"/>
+                          <a:ea typeface="Meiryo"/>
+                        </a:rPr>
+                        <a:t>パイロットで実測しベンチマーク化</a:t>
+                      </a:r>
+                    </a:p>
+                  </a:txBody>
+                  <a:tcPr anchor="ctr" marL="73152" marR="73152">
+                    <a:solidFill>
+                      <a:srgbClr val="FFFFFF"/>
+                    </a:solidFill>
+                  </a:tcPr>
+                </a:tc>
+              </a:tr>
+              <a:tr h="502920">
+                <a:tc>
+                  <a:txBody>
+                    <a:bodyPr/>
+                    <a:lstStyle/>
+                    <a:p>
+                      <a:r>
+                        <a:rPr sz="1150" b="0">
+                          <a:solidFill>
+                            <a:srgbClr val="1A1A1A"/>
+                          </a:solidFill>
+                          <a:latin typeface="Meiryo"/>
+                          <a:ea typeface="Meiryo"/>
+                        </a:rPr>
+                        <a:t>現場運用品質</a:t>
+                      </a:r>
+                    </a:p>
+                  </a:txBody>
+                  <a:tcPr anchor="ctr" marL="73152" marR="73152">
+                    <a:solidFill>
+                      <a:srgbClr val="F2F4F6"/>
+                    </a:solidFill>
+                  </a:tcPr>
+                </a:tc>
+                <a:tc>
+                  <a:txBody>
+                    <a:bodyPr/>
+                    <a:lstStyle/>
+                    <a:p>
+                      <a:r>
+                        <a:rPr sz="1150" b="0">
+                          <a:solidFill>
+                            <a:srgbClr val="1A1A1A"/>
+                          </a:solidFill>
+                          <a:latin typeface="Meiryo"/>
+                          <a:ea typeface="Meiryo"/>
+                        </a:rPr>
+                        <a:t>店舗・代理店ヒアリング、事故・クレーム件数</a:t>
+                      </a:r>
+                    </a:p>
+                  </a:txBody>
+                  <a:tcPr anchor="ctr" marL="73152" marR="73152">
+                    <a:solidFill>
+                      <a:srgbClr val="F2F4F6"/>
+                    </a:solidFill>
+                  </a:tcPr>
+                </a:tc>
+                <a:tc>
+                  <a:txBody>
+                    <a:bodyPr/>
+                    <a:lstStyle/>
+                    <a:p>
+                      <a:r>
+                        <a:rPr sz="1150" b="0">
+                          <a:solidFill>
+                            <a:srgbClr val="1A1A1A"/>
+                          </a:solidFill>
+                          <a:latin typeface="Meiryo"/>
+                          <a:ea typeface="Meiryo"/>
+                        </a:rPr>
+                        <a:t>重大事故・クレームゼロ</a:t>
+                      </a:r>
+                    </a:p>
+                  </a:txBody>
+                  <a:tcPr anchor="ctr" marL="73152" marR="73152">
+                    <a:solidFill>
+                      <a:srgbClr val="F2F4F6"/>
+                    </a:solidFill>
+                  </a:tcPr>
+                </a:tc>
+              </a:tr>
+            </a:tbl>
+          </a:graphicData>
+        </a:graphic>
+      </p:graphicFrame>
+      <p:sp>
+        <p:nvSpPr>
+          <p:cNvPr id="9" name="Rounded Rectangle 8"/>
+          <p:cNvSpPr/>
+          <p:nvPr/>
+        </p:nvSpPr>
+        <p:spPr>
+          <a:xfrm>
+            <a:off x="640080" y="4069080"/>
+            <a:ext cx="10881360" cy="1691640"/>
+          </a:xfrm>
+          <a:prstGeom prst="roundRect">
+            <a:avLst>
+              <a:gd name="adj" fmla="val 5000"/>
+            </a:avLst>
+          </a:prstGeom>
+          <a:solidFill>
+            <a:srgbClr val="FBEAEB"/>
+          </a:solidFill>
+          <a:ln>
+            <a:noFill/>
+          </a:ln>
+          <a:effectLst/>
+        </p:spPr>
+        <p:style>
+          <a:lnRef idx="1">
+            <a:schemeClr val="accent1"/>
+          </a:lnRef>
+          <a:fillRef idx="3">
+            <a:schemeClr val="accent1"/>
+          </a:fillRef>
+          <a:effectRef idx="2">
+            <a:schemeClr val="accent1"/>
+          </a:effectRef>
+          <a:fontRef idx="minor">
+            <a:schemeClr val="lt1"/>
+          </a:fontRef>
+        </p:style>
+        <p:txBody>
+          <a:bodyPr rtlCol="0" anchor="ctr"/>
+          <a:lstStyle/>
+          <a:p>
+            <a:pPr algn="ctr"/>
+          </a:p>
+        </p:txBody>
+      </p:sp>
+      <p:sp>
+        <p:nvSpPr>
+          <p:cNvPr id="10" name="TextBox 9"/>
+          <p:cNvSpPr txBox="1"/>
+          <p:nvPr/>
+        </p:nvSpPr>
+        <p:spPr>
+          <a:xfrm>
+            <a:off x="914400" y="4224528"/>
+            <a:ext cx="10332720" cy="1463040"/>
+          </a:xfrm>
+          <a:prstGeom prst="rect">
+            <a:avLst/>
+          </a:prstGeom>
+          <a:noFill/>
+        </p:spPr>
+        <p:txBody>
+          <a:bodyPr wrap="square" anchor="t" lIns="0" rIns="0" tIns="0" bIns="0">
+            <a:spAutoFit/>
+          </a:bodyPr>
+          <a:lstStyle/>
+          <a:p>
+            <a:pPr algn="l">
+              <a:spcAft>
+                <a:spcPts val="500"/>
+              </a:spcAft>
+            </a:pPr>
+            <a:r>
+              <a:rPr sz="1350" b="1">
+                <a:solidFill>
+                  <a:srgbClr val="C00000"/>
+                </a:solidFill>
+                <a:latin typeface="Meiryo"/>
+                <a:ea typeface="Meiryo"/>
+              </a:rPr>
+              <a:t>年間契約への接続条件(基本合意書で事前にご合意)</a:t>
+            </a:r>
+          </a:p>
+          <a:p>
+            <a:pPr algn="l">
+              <a:spcAft>
+                <a:spcPts val="500"/>
+              </a:spcAft>
+            </a:pPr>
+            <a:r>
+              <a:rPr sz="1250" b="0">
+                <a:solidFill>
+                  <a:srgbClr val="1A1A1A"/>
+                </a:solidFill>
+                <a:latin typeface="Meiryo"/>
+                <a:ea typeface="Meiryo"/>
+              </a:rPr>
+              <a:t>① 成功基準を達成した場合、年間契約へ移行することをパイロット開始前に基本合意(LOI)</a:t>
+            </a:r>
+          </a:p>
+          <a:p>
+            <a:pPr algn="l">
+              <a:spcAft>
+                <a:spcPts val="500"/>
+              </a:spcAft>
+            </a:pPr>
+            <a:r>
+              <a:rPr sz="1250" b="0">
+                <a:solidFill>
+                  <a:srgbClr val="1A1A1A"/>
+                </a:solidFill>
+                <a:latin typeface="Meiryo"/>
+                <a:ea typeface="Meiryo"/>
+              </a:rPr>
+              <a:t>② 短期IP使用料300万円は、年間契約の初年度IP使用料に全額充当(=パイロット費用は実質ゼロに)</a:t>
+            </a:r>
+          </a:p>
+          <a:p>
+            <a:pPr algn="l">
+              <a:spcAft>
+                <a:spcPts val="500"/>
+              </a:spcAft>
+            </a:pPr>
+            <a:r>
+              <a:rPr sz="1250" b="0">
+                <a:solidFill>
+                  <a:srgbClr val="1A1A1A"/>
+                </a:solidFill>
+                <a:latin typeface="Meiryo"/>
+                <a:ea typeface="Meiryo"/>
+              </a:rPr>
+              <a:t>③ パイロット期間中のご締結で、60周年記念素材・限定ビジュアルを初年度特典としてご提供</a:t>
+            </a:r>
+          </a:p>
+          <a:p>
+            <a:pPr algn="l">
+              <a:spcAft>
+                <a:spcPts val="500"/>
+              </a:spcAft>
+            </a:pPr>
+            <a:r>
+              <a:rPr sz="1250" b="0">
+                <a:solidFill>
+                  <a:srgbClr val="1A1A1A"/>
+                </a:solidFill>
+                <a:latin typeface="Meiryo"/>
+                <a:ea typeface="Meiryo"/>
+              </a:rPr>
+              <a:t>④ 計測データは月次レポートで貴社ご報告用フォーマットに整えてご提出(社内ご説明にそのままご利用いただけます)</a:t>
+            </a:r>
+          </a:p>
+        </p:txBody>
+      </p:sp>
+    </p:spTree>
+  </p:cSld>
+  <p:clrMapOvr>
+    <a:masterClrMapping/>
+  </p:clrMapOvr>
+</p:sld>
+</file>
+
+<file path=ppt/slides/slide4.xml><?xml version="1.0" encoding="utf-8"?>
+<p:sld xmlns:a="http://schemas.openxmlformats.org/drawingml/2006/main" xmlns:p="http://schemas.openxmlformats.org/presentationml/2006/main" xmlns:r="http://schemas.openxmlformats.org/officeDocument/2006/relationships">
+  <p:cSld>
+    <p:spTree>
+      <p:nvGrpSpPr>
+        <p:cNvPr id="1" name=""/>
+        <p:cNvGrpSpPr/>
+        <p:nvPr/>
+      </p:nvGrpSpPr>
+      <p:grpSpPr/>
+      <p:pic>
+        <p:nvPicPr>
+          <p:cNvPr id="2" name="Picture 1" descr="band_header.png"/>
+          <p:cNvPicPr>
+            <a:picLocks noChangeAspect="1"/>
+          </p:cNvPicPr>
+          <p:nvPr/>
+        </p:nvPicPr>
+        <p:blipFill>
+          <a:blip r:embed="rId2"/>
+          <a:stretch>
+            <a:fillRect/>
+          </a:stretch>
+        </p:blipFill>
+        <p:spPr>
+          <a:xfrm>
+            <a:off x="0" y="0"/>
+            <a:ext cx="12191695" cy="786384"/>
+          </a:xfrm>
+          <a:prstGeom prst="rect">
+            <a:avLst/>
+          </a:prstGeom>
+        </p:spPr>
+      </p:pic>
+      <p:sp>
+        <p:nvSpPr>
+          <p:cNvPr id="3" name="TextBox 2"/>
+          <p:cNvSpPr txBox="1"/>
+          <p:nvPr/>
+        </p:nvSpPr>
+        <p:spPr>
+          <a:xfrm>
+            <a:off x="457200" y="73152"/>
+            <a:ext cx="10241280" cy="640080"/>
+          </a:xfrm>
+          <a:prstGeom prst="rect">
+            <a:avLst/>
+          </a:prstGeom>
+          <a:noFill/>
+        </p:spPr>
+        <p:txBody>
+          <a:bodyPr wrap="square" anchor="ctr" lIns="0" rIns="0" tIns="0" bIns="0">
+            <a:spAutoFit/>
+          </a:bodyPr>
+          <a:lstStyle/>
+          <a:p>
+            <a:pPr algn="l">
+              <a:spcAft>
+                <a:spcPts val="500"/>
+              </a:spcAft>
+            </a:pPr>
+            <a:r>
+              <a:rPr sz="2100" b="1">
+                <a:solidFill>
+                  <a:srgbClr val="FFFFFF"/>
+                </a:solidFill>
+                <a:latin typeface="Meiryo"/>
+                <a:ea typeface="Meiryo"/>
+              </a:rPr>
+              <a:t>年間展開へのランプアップ計画</a:t>
+            </a:r>
+          </a:p>
+        </p:txBody>
+      </p:sp>
+      <p:sp>
+        <p:nvSpPr>
+          <p:cNvPr id="4" name="TextBox 3"/>
+          <p:cNvSpPr txBox="1"/>
+          <p:nvPr/>
+        </p:nvSpPr>
+        <p:spPr>
+          <a:xfrm>
+            <a:off x="502920" y="896112"/>
+            <a:ext cx="11155680" cy="365760"/>
+          </a:xfrm>
+          <a:prstGeom prst="rect">
+            <a:avLst/>
+          </a:prstGeom>
+          <a:noFill/>
+        </p:spPr>
+        <p:txBody>
+          <a:bodyPr wrap="square" anchor="t" lIns="0" rIns="0" tIns="0" bIns="0">
+            <a:spAutoFit/>
+          </a:bodyPr>
+          <a:lstStyle/>
+          <a:p>
+            <a:pPr algn="l">
+              <a:spcAft>
+                <a:spcPts val="500"/>
+              </a:spcAft>
+            </a:pPr>
+            <a:r>
+              <a:rPr sz="1250" b="0">
+                <a:solidFill>
+                  <a:srgbClr val="5A626B"/>
+                </a:solidFill>
+                <a:latin typeface="Meiryo"/>
+                <a:ea typeface="Meiryo"/>
+              </a:rPr>
+              <a:t>パイロットと並行して供給体制を整備し、判定後は待ち時間ゼロで全国拡大へ移行します</a:t>
+            </a:r>
+          </a:p>
+        </p:txBody>
+      </p:sp>
+      <p:sp>
+        <p:nvSpPr>
+          <p:cNvPr id="5" name="TextBox 4"/>
+          <p:cNvSpPr txBox="1"/>
+          <p:nvPr/>
+        </p:nvSpPr>
+        <p:spPr>
+          <a:xfrm>
+            <a:off x="4727448" y="6547104"/>
+            <a:ext cx="2743200" cy="256032"/>
+          </a:xfrm>
+          <a:prstGeom prst="rect">
+            <a:avLst/>
+          </a:prstGeom>
+          <a:noFill/>
+        </p:spPr>
+        <p:txBody>
+          <a:bodyPr wrap="square" anchor="t" lIns="0" rIns="0" tIns="0" bIns="0">
+            <a:spAutoFit/>
+          </a:bodyPr>
+          <a:lstStyle/>
+          <a:p>
+            <a:pPr algn="ctr">
+              <a:spcAft>
+                <a:spcPts val="500"/>
+              </a:spcAft>
+            </a:pPr>
+            <a:r>
+              <a:rPr sz="800" b="0">
+                <a:solidFill>
+                  <a:srgbClr val="8E949B"/>
+                </a:solidFill>
+                <a:latin typeface="Meiryo"/>
+                <a:ea typeface="Meiryo"/>
+              </a:rPr>
+              <a:t>© TSUBURAYA PRODUCTIONS</a:t>
+            </a:r>
+          </a:p>
+        </p:txBody>
+      </p:sp>
+      <p:sp>
+        <p:nvSpPr>
+          <p:cNvPr id="6" name="TextBox 5"/>
+          <p:cNvSpPr txBox="1"/>
+          <p:nvPr/>
+        </p:nvSpPr>
+        <p:spPr>
+          <a:xfrm>
+            <a:off x="9372600" y="6492240"/>
+            <a:ext cx="2011680" cy="274320"/>
+          </a:xfrm>
+          <a:prstGeom prst="rect">
+            <a:avLst/>
+          </a:prstGeom>
+          <a:noFill/>
+        </p:spPr>
+        <p:txBody>
+          <a:bodyPr wrap="square" anchor="t" lIns="0" rIns="0" tIns="0" bIns="0">
+            <a:spAutoFit/>
+          </a:bodyPr>
+          <a:lstStyle/>
+          <a:p>
+            <a:pPr algn="r">
+              <a:spcAft>
+                <a:spcPts val="500"/>
+              </a:spcAft>
+            </a:pPr>
+            <a:r>
+              <a:rPr sz="1000" b="1">
+                <a:solidFill>
+                  <a:srgbClr val="C00000"/>
+                </a:solidFill>
+                <a:latin typeface="Meiryo"/>
+                <a:ea typeface="Meiryo"/>
+              </a:rPr>
+              <a:t>Strictly Confidential</a:t>
+            </a:r>
+          </a:p>
+        </p:txBody>
+      </p:sp>
+      <p:sp>
+        <p:nvSpPr>
+          <p:cNvPr id="7" name="TextBox 6"/>
+          <p:cNvSpPr txBox="1"/>
+          <p:nvPr/>
+        </p:nvSpPr>
+        <p:spPr>
+          <a:xfrm>
+            <a:off x="11521440" y="6492240"/>
+            <a:ext cx="457200" cy="274320"/>
+          </a:xfrm>
+          <a:prstGeom prst="rect">
+            <a:avLst/>
+          </a:prstGeom>
+          <a:noFill/>
+        </p:spPr>
+        <p:txBody>
+          <a:bodyPr wrap="square" anchor="t" lIns="0" rIns="0" tIns="0" bIns="0">
+            <a:spAutoFit/>
+          </a:bodyPr>
+          <a:lstStyle/>
+          <a:p>
+            <a:pPr algn="r">
+              <a:spcAft>
+                <a:spcPts val="500"/>
+              </a:spcAft>
+            </a:pPr>
+            <a:r>
+              <a:rPr sz="1000" b="0">
+                <a:solidFill>
+                  <a:srgbClr val="8E949B"/>
+                </a:solidFill>
+                <a:latin typeface="Meiryo"/>
+                <a:ea typeface="Meiryo"/>
+              </a:rPr>
+              <a:t>4</a:t>
+            </a:r>
+          </a:p>
+        </p:txBody>
+      </p:sp>
+      <p:sp>
+        <p:nvSpPr>
+          <p:cNvPr id="8" name="Rounded Rectangle 7"/>
+          <p:cNvSpPr/>
+          <p:nvPr/>
+        </p:nvSpPr>
+        <p:spPr>
+          <a:xfrm>
+            <a:off x="822960" y="1554480"/>
+            <a:ext cx="10515600" cy="658368"/>
+          </a:xfrm>
+          <a:prstGeom prst="roundRect">
+            <a:avLst>
+              <a:gd name="adj" fmla="val 12000"/>
+            </a:avLst>
+          </a:prstGeom>
+          <a:solidFill>
+            <a:srgbClr val="F2F4F6"/>
+          </a:solidFill>
+          <a:ln>
+            <a:noFill/>
+          </a:ln>
+          <a:effectLst/>
+        </p:spPr>
+        <p:style>
+          <a:lnRef idx="1">
+            <a:schemeClr val="accent1"/>
+          </a:lnRef>
+          <a:fillRef idx="3">
+            <a:schemeClr val="accent1"/>
+          </a:fillRef>
+          <a:effectRef idx="2">
+            <a:schemeClr val="accent1"/>
+          </a:effectRef>
+          <a:fontRef idx="minor">
+            <a:schemeClr val="lt1"/>
+          </a:fontRef>
+        </p:style>
+        <p:txBody>
+          <a:bodyPr rtlCol="0" anchor="ctr" wrap="square" lIns="228600"/>
+          <a:lstStyle/>
+          <a:p>
+            <a:pPr algn="ctr"/>
+            <a:r>
+              <a:rPr sz="1300" b="1">
+                <a:solidFill>
+                  <a:srgbClr val="C00000"/>
+                </a:solidFill>
+                <a:latin typeface="Meiryo"/>
+                <a:ea typeface="Meiryo"/>
+              </a:rPr>
+              <a:t>2027年4月〜6月  </a:t>
+            </a:r>
+            <a:r>
+              <a:rPr sz="1300" b="0">
+                <a:solidFill>
+                  <a:srgbClr val="1A1A1A"/>
+                </a:solidFill>
+                <a:latin typeface="Meiryo"/>
+                <a:ea typeface="Meiryo"/>
+              </a:rPr>
+              <a:t>パイロット:首都圏5〜10店舗・10〜20開催。月次レビューで基準進捗を確認</a:t>
+            </a:r>
+          </a:p>
+        </p:txBody>
+      </p:sp>
+      <p:sp>
+        <p:nvSpPr>
+          <p:cNvPr id="9" name="Down Arrow 8"/>
+          <p:cNvSpPr/>
+          <p:nvPr/>
+        </p:nvSpPr>
+        <p:spPr>
+          <a:xfrm>
+            <a:off x="5943600" y="2194560"/>
+            <a:ext cx="201168" cy="128016"/>
+          </a:xfrm>
+          <a:prstGeom prst="downArrow">
+            <a:avLst/>
+          </a:prstGeom>
+          <a:solidFill>
+            <a:srgbClr val="C00000"/>
+          </a:solidFill>
+          <a:ln>
+            <a:noFill/>
+          </a:ln>
+          <a:effectLst/>
+        </p:spPr>
+        <p:style>
+          <a:lnRef idx="1">
+            <a:schemeClr val="accent1"/>
+          </a:lnRef>
+          <a:fillRef idx="3">
+            <a:schemeClr val="accent1"/>
+          </a:fillRef>
+          <a:effectRef idx="2">
+            <a:schemeClr val="accent1"/>
+          </a:effectRef>
+          <a:fontRef idx="minor">
+            <a:schemeClr val="lt1"/>
+          </a:fontRef>
+        </p:style>
+        <p:txBody>
+          <a:bodyPr rtlCol="0" anchor="ctr"/>
+          <a:lstStyle/>
+          <a:p>
+            <a:pPr algn="ctr"/>
+          </a:p>
+        </p:txBody>
+      </p:sp>
+      <p:sp>
+        <p:nvSpPr>
+          <p:cNvPr id="10" name="Rounded Rectangle 9"/>
+          <p:cNvSpPr/>
+          <p:nvPr/>
+        </p:nvSpPr>
+        <p:spPr>
+          <a:xfrm>
+            <a:off x="822960" y="2340864"/>
+            <a:ext cx="10515600" cy="658368"/>
+          </a:xfrm>
+          <a:prstGeom prst="roundRect">
+            <a:avLst>
+              <a:gd name="adj" fmla="val 12000"/>
+            </a:avLst>
+          </a:prstGeom>
+          <a:solidFill>
+            <a:srgbClr val="FBEAEB"/>
+          </a:solidFill>
+          <a:ln>
+            <a:noFill/>
+          </a:ln>
+          <a:effectLst/>
+        </p:spPr>
+        <p:style>
+          <a:lnRef idx="1">
+            <a:schemeClr val="accent1"/>
+          </a:lnRef>
+          <a:fillRef idx="3">
+            <a:schemeClr val="accent1"/>
+          </a:fillRef>
+          <a:effectRef idx="2">
+            <a:schemeClr val="accent1"/>
+          </a:effectRef>
+          <a:fontRef idx="minor">
+            <a:schemeClr val="lt1"/>
+          </a:fontRef>
+        </p:style>
+        <p:txBody>
+          <a:bodyPr rtlCol="0" anchor="ctr" wrap="square" lIns="228600"/>
+          <a:lstStyle/>
+          <a:p>
+            <a:pPr algn="ctr"/>
+            <a:r>
+              <a:rPr sz="1300" b="1">
+                <a:solidFill>
+                  <a:srgbClr val="C00000"/>
+                </a:solidFill>
+                <a:latin typeface="Meiryo"/>
+                <a:ea typeface="Meiryo"/>
+              </a:rPr>
+              <a:t>2027年7月  </a:t>
+            </a:r>
+            <a:r>
+              <a:rPr sz="1300" b="0">
+                <a:solidFill>
+                  <a:srgbClr val="1A1A1A"/>
+                </a:solidFill>
+                <a:latin typeface="Meiryo"/>
+                <a:ea typeface="Meiryo"/>
+              </a:rPr>
+              <a:t>成功基準の判定 → 年間契約へ移行(基本合意済みのためスムーズに発効)</a:t>
+            </a:r>
+          </a:p>
+        </p:txBody>
+      </p:sp>
+      <p:sp>
+        <p:nvSpPr>
+          <p:cNvPr id="11" name="Down Arrow 10"/>
+          <p:cNvSpPr/>
+          <p:nvPr/>
+        </p:nvSpPr>
+        <p:spPr>
+          <a:xfrm>
+            <a:off x="5943600" y="2980944"/>
+            <a:ext cx="201168" cy="128016"/>
+          </a:xfrm>
+          <a:prstGeom prst="downArrow">
+            <a:avLst/>
+          </a:prstGeom>
+          <a:solidFill>
+            <a:srgbClr val="C00000"/>
+          </a:solidFill>
+          <a:ln>
+            <a:noFill/>
+          </a:ln>
+          <a:effectLst/>
+        </p:spPr>
+        <p:style>
+          <a:lnRef idx="1">
+            <a:schemeClr val="accent1"/>
+          </a:lnRef>
+          <a:fillRef idx="3">
+            <a:schemeClr val="accent1"/>
+          </a:fillRef>
+          <a:effectRef idx="2">
+            <a:schemeClr val="accent1"/>
+          </a:effectRef>
+          <a:fontRef idx="minor">
+            <a:schemeClr val="lt1"/>
+          </a:fontRef>
+        </p:style>
+        <p:txBody>
+          <a:bodyPr rtlCol="0" anchor="ctr"/>
+          <a:lstStyle/>
+          <a:p>
+            <a:pPr algn="ctr"/>
+          </a:p>
+        </p:txBody>
+      </p:sp>
+      <p:sp>
+        <p:nvSpPr>
+          <p:cNvPr id="12" name="Rounded Rectangle 11"/>
+          <p:cNvSpPr/>
+          <p:nvPr/>
+        </p:nvSpPr>
+        <p:spPr>
+          <a:xfrm>
+            <a:off x="822960" y="3127248"/>
+            <a:ext cx="10515600" cy="658368"/>
+          </a:xfrm>
+          <a:prstGeom prst="roundRect">
+            <a:avLst>
+              <a:gd name="adj" fmla="val 12000"/>
+            </a:avLst>
+          </a:prstGeom>
+          <a:solidFill>
+            <a:srgbClr val="F2F4F6"/>
+          </a:solidFill>
+          <a:ln>
+            <a:noFill/>
+          </a:ln>
+          <a:effectLst/>
+        </p:spPr>
+        <p:style>
+          <a:lnRef idx="1">
+            <a:schemeClr val="accent1"/>
+          </a:lnRef>
+          <a:fillRef idx="3">
+            <a:schemeClr val="accent1"/>
+          </a:fillRef>
+          <a:effectRef idx="2">
+            <a:schemeClr val="accent1"/>
+          </a:effectRef>
+          <a:fontRef idx="minor">
+            <a:schemeClr val="lt1"/>
+          </a:fontRef>
+        </p:style>
+        <p:txBody>
+          <a:bodyPr rtlCol="0" anchor="ctr" wrap="square" lIns="228600"/>
+          <a:lstStyle/>
+          <a:p>
+            <a:pPr algn="ctr"/>
+            <a:r>
+              <a:rPr sz="1300" b="1">
+                <a:solidFill>
+                  <a:srgbClr val="C00000"/>
+                </a:solidFill>
+                <a:latin typeface="Meiryo"/>
+                <a:ea typeface="Meiryo"/>
+              </a:rPr>
+              <a:t>2027年7月〜9月  </a:t>
+            </a:r>
+            <a:r>
+              <a:rPr sz="1300" b="0">
+                <a:solidFill>
+                  <a:srgbClr val="1A1A1A"/>
+                </a:solidFill>
+                <a:latin typeface="Meiryo"/>
+                <a:ea typeface="Meiryo"/>
+              </a:rPr>
+              <a:t>夏休み商戦:約100開催規模へ拡大(関東+主要都市)</a:t>
+            </a:r>
+          </a:p>
+        </p:txBody>
+      </p:sp>
+      <p:sp>
+        <p:nvSpPr>
+          <p:cNvPr id="13" name="Down Arrow 12"/>
+          <p:cNvSpPr/>
+          <p:nvPr/>
+        </p:nvSpPr>
+        <p:spPr>
+          <a:xfrm>
+            <a:off x="5943600" y="3767328"/>
+            <a:ext cx="201168" cy="128016"/>
+          </a:xfrm>
+          <a:prstGeom prst="downArrow">
+            <a:avLst/>
+          </a:prstGeom>
+          <a:solidFill>
+            <a:srgbClr val="C00000"/>
+          </a:solidFill>
+          <a:ln>
+            <a:noFill/>
+          </a:ln>
+          <a:effectLst/>
+        </p:spPr>
+        <p:style>
+          <a:lnRef idx="1">
+            <a:schemeClr val="accent1"/>
+          </a:lnRef>
+          <a:fillRef idx="3">
+            <a:schemeClr val="accent1"/>
+          </a:fillRef>
+          <a:effectRef idx="2">
+            <a:schemeClr val="accent1"/>
+          </a:effectRef>
+          <a:fontRef idx="minor">
+            <a:schemeClr val="lt1"/>
+          </a:fontRef>
+        </p:style>
+        <p:txBody>
+          <a:bodyPr rtlCol="0" anchor="ctr"/>
+          <a:lstStyle/>
+          <a:p>
+            <a:pPr algn="ctr"/>
+          </a:p>
+        </p:txBody>
+      </p:sp>
+      <p:sp>
+        <p:nvSpPr>
+          <p:cNvPr id="14" name="Rounded Rectangle 13"/>
+          <p:cNvSpPr/>
+          <p:nvPr/>
+        </p:nvSpPr>
+        <p:spPr>
+          <a:xfrm>
+            <a:off x="822960" y="3913632"/>
+            <a:ext cx="10515600" cy="658368"/>
+          </a:xfrm>
+          <a:prstGeom prst="roundRect">
+            <a:avLst>
+              <a:gd name="adj" fmla="val 12000"/>
+            </a:avLst>
+          </a:prstGeom>
+          <a:solidFill>
+            <a:srgbClr val="F2F4F6"/>
+          </a:solidFill>
+          <a:ln>
+            <a:noFill/>
+          </a:ln>
+          <a:effectLst/>
+        </p:spPr>
+        <p:style>
+          <a:lnRef idx="1">
+            <a:schemeClr val="accent1"/>
+          </a:lnRef>
+          <a:fillRef idx="3">
+            <a:schemeClr val="accent1"/>
+          </a:fillRef>
+          <a:effectRef idx="2">
+            <a:schemeClr val="accent1"/>
+          </a:effectRef>
+          <a:fontRef idx="minor">
+            <a:schemeClr val="lt1"/>
+          </a:fontRef>
+        </p:style>
+        <p:txBody>
+          <a:bodyPr rtlCol="0" anchor="ctr" wrap="square" lIns="228600"/>
+          <a:lstStyle/>
+          <a:p>
+            <a:pPr algn="ctr"/>
+            <a:r>
+              <a:rPr sz="1300" b="1">
+                <a:solidFill>
+                  <a:srgbClr val="C00000"/>
+                </a:solidFill>
+                <a:latin typeface="Meiryo"/>
+                <a:ea typeface="Meiryo"/>
+              </a:rPr>
+              <a:t>2027年10月〜12月  </a:t>
+            </a:r>
+            <a:r>
+              <a:rPr sz="1300" b="0">
+                <a:solidFill>
+                  <a:srgbClr val="1A1A1A"/>
+                </a:solidFill>
+                <a:latin typeface="Meiryo"/>
+                <a:ea typeface="Meiryo"/>
+              </a:rPr>
+              <a:t>年末商戦:全国展開へ拡大(年率300〜600開催ペース)</a:t>
+            </a:r>
+          </a:p>
+        </p:txBody>
+      </p:sp>
+      <p:sp>
+        <p:nvSpPr>
+          <p:cNvPr id="15" name="Down Arrow 14"/>
+          <p:cNvSpPr/>
+          <p:nvPr/>
+        </p:nvSpPr>
+        <p:spPr>
+          <a:xfrm>
+            <a:off x="5943600" y="4553712"/>
+            <a:ext cx="201168" cy="128016"/>
+          </a:xfrm>
+          <a:prstGeom prst="downArrow">
+            <a:avLst/>
+          </a:prstGeom>
+          <a:solidFill>
+            <a:srgbClr val="C00000"/>
+          </a:solidFill>
+          <a:ln>
+            <a:noFill/>
+          </a:ln>
+          <a:effectLst/>
+        </p:spPr>
+        <p:style>
+          <a:lnRef idx="1">
+            <a:schemeClr val="accent1"/>
+          </a:lnRef>
+          <a:fillRef idx="3">
+            <a:schemeClr val="accent1"/>
+          </a:fillRef>
+          <a:effectRef idx="2">
+            <a:schemeClr val="accent1"/>
+          </a:effectRef>
+          <a:fontRef idx="minor">
+            <a:schemeClr val="lt1"/>
+          </a:fontRef>
+        </p:style>
+        <p:txBody>
+          <a:bodyPr rtlCol="0" anchor="ctr"/>
+          <a:lstStyle/>
+          <a:p>
+            <a:pPr algn="ctr"/>
+          </a:p>
+        </p:txBody>
+      </p:sp>
+      <p:sp>
+        <p:nvSpPr>
+          <p:cNvPr id="16" name="Rounded Rectangle 15"/>
+          <p:cNvSpPr/>
+          <p:nvPr/>
+        </p:nvSpPr>
+        <p:spPr>
+          <a:xfrm>
+            <a:off x="822960" y="4700016"/>
+            <a:ext cx="10515600" cy="658368"/>
+          </a:xfrm>
+          <a:prstGeom prst="roundRect">
+            <a:avLst>
+              <a:gd name="adj" fmla="val 12000"/>
+            </a:avLst>
+          </a:prstGeom>
+          <a:solidFill>
+            <a:srgbClr val="232278"/>
+          </a:solidFill>
+          <a:ln>
+            <a:noFill/>
+          </a:ln>
+          <a:effectLst/>
+        </p:spPr>
+        <p:style>
+          <a:lnRef idx="1">
+            <a:schemeClr val="accent1"/>
+          </a:lnRef>
+          <a:fillRef idx="3">
+            <a:schemeClr val="accent1"/>
+          </a:fillRef>
+          <a:effectRef idx="2">
+            <a:schemeClr val="accent1"/>
+          </a:effectRef>
+          <a:fontRef idx="minor">
+            <a:schemeClr val="lt1"/>
+          </a:fontRef>
+        </p:style>
+        <p:txBody>
+          <a:bodyPr rtlCol="0" anchor="ctr" wrap="square" lIns="228600"/>
+          <a:lstStyle/>
+          <a:p>
+            <a:pPr algn="ctr"/>
+            <a:r>
+              <a:rPr sz="1300" b="1">
+                <a:solidFill>
+                  <a:srgbClr val="FFFFFF"/>
+                </a:solidFill>
+                <a:latin typeface="Meiryo"/>
+                <a:ea typeface="Meiryo"/>
+              </a:rPr>
+              <a:t>2028年1月〜3月  </a:t>
+            </a:r>
+            <a:r>
+              <a:rPr sz="1300" b="1">
+                <a:solidFill>
+                  <a:srgbClr val="FFFFFF"/>
+                </a:solidFill>
+                <a:latin typeface="Meiryo"/>
+                <a:ea typeface="Meiryo"/>
+              </a:rPr>
+              <a:t>春商戦:フル稼働。FY28のフル年間展開+複数年契約のご協議</a:t>
+            </a:r>
+          </a:p>
+        </p:txBody>
+      </p:sp>
+      <p:sp>
+        <p:nvSpPr>
+          <p:cNvPr id="17" name="TextBox 16"/>
+          <p:cNvSpPr txBox="1"/>
+          <p:nvPr/>
+        </p:nvSpPr>
+        <p:spPr>
+          <a:xfrm>
+            <a:off x="822960" y="5715000"/>
+            <a:ext cx="10515600" cy="548640"/>
+          </a:xfrm>
+          <a:prstGeom prst="rect">
+            <a:avLst/>
+          </a:prstGeom>
+          <a:noFill/>
+        </p:spPr>
+        <p:txBody>
+          <a:bodyPr wrap="square" anchor="t" lIns="0" rIns="0" tIns="0" bIns="0">
+            <a:spAutoFit/>
+          </a:bodyPr>
+          <a:lstStyle/>
+          <a:p>
+            <a:pPr algn="l">
+              <a:spcAft>
+                <a:spcPts val="500"/>
+              </a:spcAft>
+            </a:pPr>
+            <a:r>
+              <a:rPr sz="1250" b="1">
+                <a:solidFill>
+                  <a:srgbClr val="C00000"/>
+                </a:solidFill>
+                <a:latin typeface="Meiryo"/>
+                <a:ea typeface="Meiryo"/>
+              </a:rPr>
+              <a:t>ポイント:</a:t>
+            </a:r>
+            <a:r>
+              <a:rPr sz="1250" b="0">
+                <a:solidFill>
+                  <a:srgbClr val="1A1A1A"/>
+                </a:solidFill>
+                <a:latin typeface="Meiryo"/>
+                <a:ea typeface="Meiryo"/>
+              </a:rPr>
+              <a:t>スーツ増産・指定アクターの研修はパイロット期間中に並行整備するため、判定後すぐに拡大できます。パイロットの計測データが、そのまま拡大時のKPI・出店計画の根拠になります。</a:t>
+            </a:r>
+          </a:p>
+        </p:txBody>
+      </p:sp>
+    </p:spTree>
+  </p:cSld>
+  <p:clrMapOvr>
+    <a:masterClrMapping/>
+  </p:clrMapOvr>
+</p:sld>
+</file>
+
 <file path=ppt/theme/theme1.xml><?xml version="1.0" encoding="utf-8"?>
 <a:theme xmlns:a="http://schemas.openxmlformats.org/drawingml/2006/main" name="Office Theme">
   <a:themeElements>
